--- a/Group-01_Campus-Connect/docs/Campus_Connect_CN_Mini_Project_PPT.pptx
+++ b/Group-01_Campus-Connect/docs/Campus_Connect_CN_Mini_Project_PPT.pptx
@@ -3705,7 +3705,7 @@
                 <a:ea typeface="Arial"/>
                 <a:cs typeface="Arial"/>
               </a:rPr>
-              <a:t>Harsh Patil – 1272250823</a:t>
+              <a:t>Harsh Patil</a:t>
             </a:r>
           </a:p>
         </p:txBody>
